--- a/downloads/module-3-slides.pptx
+++ b/downloads/module-3-slides.pptx
@@ -1529,14 +1529,14 @@
       </p:sp>
       <p:sp>
         <p:nvSpPr>
-          <p:cNvPr id="5" name="Shape 2"/>
+          <p:cNvPr id="27" name="Shape 2"/>
           <p:cNvSpPr/>
           <p:nvPr/>
         </p:nvSpPr>
         <p:spPr>
           <a:xfrm>
-            <a:off x="822960" y="2194560"/>
-            <a:ext cx="914400" cy="914400"/>
+            <a:off x="822960" y="2011680"/>
+            <a:ext cx="822960" cy="822960"/>
           </a:xfrm>
           <a:prstGeom prst="ellipse">
             <a:avLst/>
@@ -1558,14 +1558,14 @@
       </p:sp>
       <p:sp>
         <p:nvSpPr>
-          <p:cNvPr id="6" name="Text 3"/>
-          <p:cNvSpPr txBox="1"/>
-          <p:nvPr/>
-        </p:nvSpPr>
-        <p:spPr>
-          <a:xfrm>
-            <a:off x="822960" y="2194560"/>
-            <a:ext cx="914400" cy="914400"/>
+          <p:cNvPr id="28" name="Text 3"/>
+          <p:cNvSpPr txBox="1"/>
+          <p:nvPr/>
+        </p:nvSpPr>
+        <p:spPr>
+          <a:xfrm>
+            <a:off x="822960" y="2011680"/>
+            <a:ext cx="822960" cy="822960"/>
           </a:xfrm>
           <a:prstGeom prst="rect">
             <a:avLst/>
@@ -1581,7 +1581,7 @@
               <a:buNone/>
             </a:pPr>
             <a:r>
-              <a:rPr lang="en-US" sz="3000" b="1" dirty="0">
+              <a:rPr lang="en-US" sz="2800" b="1" dirty="0">
                 <a:solidFill>
                   <a:srgbClr val="3B1217"/>
                 </a:solidFill>
@@ -1597,23 +1597,23 @@
       </p:sp>
       <p:sp>
         <p:nvSpPr>
-          <p:cNvPr id="7" name="Text 4"/>
-          <p:cNvSpPr txBox="1"/>
-          <p:nvPr/>
-        </p:nvSpPr>
-        <p:spPr>
-          <a:xfrm>
-            <a:off x="548640" y="3291840"/>
-            <a:ext cx="1463040" cy="822960"/>
-          </a:xfrm>
-          <a:prstGeom prst="rect">
-            <a:avLst/>
-          </a:prstGeom>
-          <a:noFill/>
-          <a:ln/>
-        </p:spPr>
-        <p:txBody>
-          <a:bodyPr wrap="square" lIns="0" tIns="0" rIns="0" bIns="0" rtlCol="0" anchor="ctr"/>
+          <p:cNvPr id="29" name="Text 4"/>
+          <p:cNvSpPr txBox="1"/>
+          <p:nvPr/>
+        </p:nvSpPr>
+        <p:spPr>
+          <a:xfrm>
+            <a:off x="576072" y="2971800"/>
+            <a:ext cx="1316736" cy="1371600"/>
+          </a:xfrm>
+          <a:prstGeom prst="rect">
+            <a:avLst/>
+          </a:prstGeom>
+          <a:noFill/>
+          <a:ln/>
+        </p:spPr>
+        <p:txBody>
+          <a:bodyPr wrap="square" lIns="0" tIns="0" rIns="0" bIns="0" rtlCol="0" anchor="t"/>
           <a:lstStyle/>
           <a:p>
             <a:pPr algn="ctr" indent="0" marL="0">
@@ -1628,7 +1628,7 @@
                 <a:ea typeface="Calibri" pitchFamily="34" charset="-122"/>
                 <a:cs typeface="Calibri" pitchFamily="34" charset="-120"/>
               </a:rPr>
-              <a:t>Try it</a:t>
+              <a:t>Mission brief</a:t>
             </a:r>
             <a:endParaRPr lang="en-US" sz="1600" dirty="0"/>
           </a:p>
@@ -1636,14 +1636,14 @@
       </p:sp>
       <p:sp>
         <p:nvSpPr>
-          <p:cNvPr id="8" name="Shape 5"/>
+          <p:cNvPr id="30" name="Shape 2"/>
           <p:cNvSpPr/>
           <p:nvPr/>
         </p:nvSpPr>
         <p:spPr>
           <a:xfrm>
-            <a:off x="2423160" y="2194560"/>
-            <a:ext cx="914400" cy="914400"/>
+            <a:off x="2194560" y="2011680"/>
+            <a:ext cx="822960" cy="822960"/>
           </a:xfrm>
           <a:prstGeom prst="ellipse">
             <a:avLst/>
@@ -1665,14 +1665,14 @@
       </p:sp>
       <p:sp>
         <p:nvSpPr>
-          <p:cNvPr id="9" name="Text 6"/>
-          <p:cNvSpPr txBox="1"/>
-          <p:nvPr/>
-        </p:nvSpPr>
-        <p:spPr>
-          <a:xfrm>
-            <a:off x="2423160" y="2194560"/>
-            <a:ext cx="914400" cy="914400"/>
+          <p:cNvPr id="31" name="Text 3"/>
+          <p:cNvSpPr txBox="1"/>
+          <p:nvPr/>
+        </p:nvSpPr>
+        <p:spPr>
+          <a:xfrm>
+            <a:off x="2194560" y="2011680"/>
+            <a:ext cx="822960" cy="822960"/>
           </a:xfrm>
           <a:prstGeom prst="rect">
             <a:avLst/>
@@ -1688,7 +1688,7 @@
               <a:buNone/>
             </a:pPr>
             <a:r>
-              <a:rPr lang="en-US" sz="3000" b="1" dirty="0">
+              <a:rPr lang="en-US" sz="2800" b="1" dirty="0">
                 <a:solidFill>
                   <a:srgbClr val="3B1217"/>
                 </a:solidFill>
@@ -1704,23 +1704,23 @@
       </p:sp>
       <p:sp>
         <p:nvSpPr>
-          <p:cNvPr id="10" name="Text 7"/>
-          <p:cNvSpPr txBox="1"/>
-          <p:nvPr/>
-        </p:nvSpPr>
-        <p:spPr>
-          <a:xfrm>
-            <a:off x="2148840" y="3291840"/>
-            <a:ext cx="1463040" cy="822960"/>
-          </a:xfrm>
-          <a:prstGeom prst="rect">
-            <a:avLst/>
-          </a:prstGeom>
-          <a:noFill/>
-          <a:ln/>
-        </p:spPr>
-        <p:txBody>
-          <a:bodyPr wrap="square" lIns="0" tIns="0" rIns="0" bIns="0" rtlCol="0" anchor="ctr"/>
+          <p:cNvPr id="32" name="Text 4"/>
+          <p:cNvSpPr txBox="1"/>
+          <p:nvPr/>
+        </p:nvSpPr>
+        <p:spPr>
+          <a:xfrm>
+            <a:off x="1947672" y="2971800"/>
+            <a:ext cx="1316736" cy="1371600"/>
+          </a:xfrm>
+          <a:prstGeom prst="rect">
+            <a:avLst/>
+          </a:prstGeom>
+          <a:noFill/>
+          <a:ln/>
+        </p:spPr>
+        <p:txBody>
+          <a:bodyPr wrap="square" lIns="0" tIns="0" rIns="0" bIns="0" rtlCol="0" anchor="t"/>
           <a:lstStyle/>
           <a:p>
             <a:pPr algn="ctr" indent="0" marL="0">
@@ -1735,7 +1735,7 @@
                 <a:ea typeface="Calibri" pitchFamily="34" charset="-122"/>
                 <a:cs typeface="Calibri" pitchFamily="34" charset="-120"/>
               </a:rPr>
-              <a:t>Learn</a:t>
+              <a:t>Try it first</a:t>
             </a:r>
             <a:endParaRPr lang="en-US" sz="1600" dirty="0"/>
           </a:p>
@@ -1743,14 +1743,14 @@
       </p:sp>
       <p:sp>
         <p:nvSpPr>
-          <p:cNvPr id="11" name="Shape 8"/>
+          <p:cNvPr id="33" name="Shape 2"/>
           <p:cNvSpPr/>
           <p:nvPr/>
         </p:nvSpPr>
         <p:spPr>
           <a:xfrm>
-            <a:off x="4023360" y="2194560"/>
-            <a:ext cx="914400" cy="914400"/>
+            <a:off x="3566159" y="2011680"/>
+            <a:ext cx="822960" cy="822960"/>
           </a:xfrm>
           <a:prstGeom prst="ellipse">
             <a:avLst/>
@@ -1772,14 +1772,14 @@
       </p:sp>
       <p:sp>
         <p:nvSpPr>
-          <p:cNvPr id="12" name="Text 9"/>
-          <p:cNvSpPr txBox="1"/>
-          <p:nvPr/>
-        </p:nvSpPr>
-        <p:spPr>
-          <a:xfrm>
-            <a:off x="4023360" y="2194560"/>
-            <a:ext cx="914400" cy="914400"/>
+          <p:cNvPr id="34" name="Text 3"/>
+          <p:cNvSpPr txBox="1"/>
+          <p:nvPr/>
+        </p:nvSpPr>
+        <p:spPr>
+          <a:xfrm>
+            <a:off x="3566159" y="2011680"/>
+            <a:ext cx="822960" cy="822960"/>
           </a:xfrm>
           <a:prstGeom prst="rect">
             <a:avLst/>
@@ -1795,7 +1795,7 @@
               <a:buNone/>
             </a:pPr>
             <a:r>
-              <a:rPr lang="en-US" sz="3000" b="1" dirty="0">
+              <a:rPr lang="en-US" sz="2800" b="1" dirty="0">
                 <a:solidFill>
                   <a:srgbClr val="3B1217"/>
                 </a:solidFill>
@@ -1811,23 +1811,23 @@
       </p:sp>
       <p:sp>
         <p:nvSpPr>
-          <p:cNvPr id="13" name="Text 10"/>
-          <p:cNvSpPr txBox="1"/>
-          <p:nvPr/>
-        </p:nvSpPr>
-        <p:spPr>
-          <a:xfrm>
-            <a:off x="3749040" y="3291840"/>
-            <a:ext cx="1463040" cy="822960"/>
-          </a:xfrm>
-          <a:prstGeom prst="rect">
-            <a:avLst/>
-          </a:prstGeom>
-          <a:noFill/>
-          <a:ln/>
-        </p:spPr>
-        <p:txBody>
-          <a:bodyPr wrap="square" lIns="0" tIns="0" rIns="0" bIns="0" rtlCol="0" anchor="ctr"/>
+          <p:cNvPr id="35" name="Text 4"/>
+          <p:cNvSpPr txBox="1"/>
+          <p:nvPr/>
+        </p:nvSpPr>
+        <p:spPr>
+          <a:xfrm>
+            <a:off x="3319272" y="2971800"/>
+            <a:ext cx="1316736" cy="1371600"/>
+          </a:xfrm>
+          <a:prstGeom prst="rect">
+            <a:avLst/>
+          </a:prstGeom>
+          <a:noFill/>
+          <a:ln/>
+        </p:spPr>
+        <p:txBody>
+          <a:bodyPr wrap="square" lIns="0" tIns="0" rIns="0" bIns="0" rtlCol="0" anchor="t"/>
           <a:lstStyle/>
           <a:p>
             <a:pPr algn="ctr" indent="0" marL="0">
@@ -1842,7 +1842,7 @@
                 <a:ea typeface="Calibri" pitchFamily="34" charset="-122"/>
                 <a:cs typeface="Calibri" pitchFamily="34" charset="-120"/>
               </a:rPr>
-              <a:t>Ethics</a:t>
+              <a:t>Learn</a:t>
             </a:r>
             <a:endParaRPr lang="en-US" sz="1600" dirty="0"/>
           </a:p>
@@ -1850,14 +1850,14 @@
       </p:sp>
       <p:sp>
         <p:nvSpPr>
-          <p:cNvPr id="14" name="Shape 11"/>
+          <p:cNvPr id="36" name="Shape 2"/>
           <p:cNvSpPr/>
           <p:nvPr/>
         </p:nvSpPr>
         <p:spPr>
           <a:xfrm>
-            <a:off x="5623560" y="2194560"/>
-            <a:ext cx="914400" cy="914400"/>
+            <a:off x="4937759" y="2011680"/>
+            <a:ext cx="822960" cy="822960"/>
           </a:xfrm>
           <a:prstGeom prst="ellipse">
             <a:avLst/>
@@ -1879,14 +1879,14 @@
       </p:sp>
       <p:sp>
         <p:nvSpPr>
-          <p:cNvPr id="15" name="Text 12"/>
-          <p:cNvSpPr txBox="1"/>
-          <p:nvPr/>
-        </p:nvSpPr>
-        <p:spPr>
-          <a:xfrm>
-            <a:off x="5623560" y="2194560"/>
-            <a:ext cx="914400" cy="914400"/>
+          <p:cNvPr id="37" name="Text 3"/>
+          <p:cNvSpPr txBox="1"/>
+          <p:nvPr/>
+        </p:nvSpPr>
+        <p:spPr>
+          <a:xfrm>
+            <a:off x="4937759" y="2011680"/>
+            <a:ext cx="822960" cy="822960"/>
           </a:xfrm>
           <a:prstGeom prst="rect">
             <a:avLst/>
@@ -1902,7 +1902,7 @@
               <a:buNone/>
             </a:pPr>
             <a:r>
-              <a:rPr lang="en-US" sz="3000" b="1" dirty="0">
+              <a:rPr lang="en-US" sz="2800" b="1" dirty="0">
                 <a:solidFill>
                   <a:srgbClr val="3B1217"/>
                 </a:solidFill>
@@ -1918,23 +1918,23 @@
       </p:sp>
       <p:sp>
         <p:nvSpPr>
-          <p:cNvPr id="16" name="Text 13"/>
-          <p:cNvSpPr txBox="1"/>
-          <p:nvPr/>
-        </p:nvSpPr>
-        <p:spPr>
-          <a:xfrm>
-            <a:off x="5349240" y="3291840"/>
-            <a:ext cx="1463040" cy="822960"/>
-          </a:xfrm>
-          <a:prstGeom prst="rect">
-            <a:avLst/>
-          </a:prstGeom>
-          <a:noFill/>
-          <a:ln/>
-        </p:spPr>
-        <p:txBody>
-          <a:bodyPr wrap="square" lIns="0" tIns="0" rIns="0" bIns="0" rtlCol="0" anchor="ctr"/>
+          <p:cNvPr id="38" name="Text 4"/>
+          <p:cNvSpPr txBox="1"/>
+          <p:nvPr/>
+        </p:nvSpPr>
+        <p:spPr>
+          <a:xfrm>
+            <a:off x="4690872" y="2971800"/>
+            <a:ext cx="1316736" cy="1371600"/>
+          </a:xfrm>
+          <a:prstGeom prst="rect">
+            <a:avLst/>
+          </a:prstGeom>
+          <a:noFill/>
+          <a:ln/>
+        </p:spPr>
+        <p:txBody>
+          <a:bodyPr wrap="square" lIns="0" tIns="0" rIns="0" bIns="0" rtlCol="0" anchor="t"/>
           <a:lstStyle/>
           <a:p>
             <a:pPr algn="ctr" indent="0" marL="0">
@@ -1949,7 +1949,7 @@
                 <a:ea typeface="Calibri" pitchFamily="34" charset="-122"/>
                 <a:cs typeface="Calibri" pitchFamily="34" charset="-120"/>
               </a:rPr>
-              <a:t>Chain + coach</a:t>
+              <a:t>Ethics checkpoint</a:t>
             </a:r>
             <a:endParaRPr lang="en-US" sz="1600" dirty="0"/>
           </a:p>
@@ -1957,14 +1957,14 @@
       </p:sp>
       <p:sp>
         <p:nvSpPr>
-          <p:cNvPr id="17" name="Shape 14"/>
+          <p:cNvPr id="39" name="Shape 2"/>
           <p:cNvSpPr/>
           <p:nvPr/>
         </p:nvSpPr>
         <p:spPr>
           <a:xfrm>
-            <a:off x="7223760" y="2194560"/>
-            <a:ext cx="914400" cy="914400"/>
+            <a:off x="6309359" y="2011680"/>
+            <a:ext cx="822960" cy="822960"/>
           </a:xfrm>
           <a:prstGeom prst="ellipse">
             <a:avLst/>
@@ -1986,14 +1986,14 @@
       </p:sp>
       <p:sp>
         <p:nvSpPr>
-          <p:cNvPr id="18" name="Text 15"/>
-          <p:cNvSpPr txBox="1"/>
-          <p:nvPr/>
-        </p:nvSpPr>
-        <p:spPr>
-          <a:xfrm>
-            <a:off x="7223760" y="2194560"/>
-            <a:ext cx="914400" cy="914400"/>
+          <p:cNvPr id="40" name="Text 3"/>
+          <p:cNvSpPr txBox="1"/>
+          <p:nvPr/>
+        </p:nvSpPr>
+        <p:spPr>
+          <a:xfrm>
+            <a:off x="6309359" y="2011680"/>
+            <a:ext cx="822960" cy="822960"/>
           </a:xfrm>
           <a:prstGeom prst="rect">
             <a:avLst/>
@@ -2009,7 +2009,7 @@
               <a:buNone/>
             </a:pPr>
             <a:r>
-              <a:rPr lang="en-US" sz="3000" b="1" dirty="0">
+              <a:rPr lang="en-US" sz="2800" b="1" dirty="0">
                 <a:solidFill>
                   <a:srgbClr val="3B1217"/>
                 </a:solidFill>
@@ -2025,23 +2025,23 @@
       </p:sp>
       <p:sp>
         <p:nvSpPr>
-          <p:cNvPr id="19" name="Text 16"/>
-          <p:cNvSpPr txBox="1"/>
-          <p:nvPr/>
-        </p:nvSpPr>
-        <p:spPr>
-          <a:xfrm>
-            <a:off x="6949440" y="3291840"/>
-            <a:ext cx="1463040" cy="822960"/>
-          </a:xfrm>
-          <a:prstGeom prst="rect">
-            <a:avLst/>
-          </a:prstGeom>
-          <a:noFill/>
-          <a:ln/>
-        </p:spPr>
-        <p:txBody>
-          <a:bodyPr wrap="square" lIns="0" tIns="0" rIns="0" bIns="0" rtlCol="0" anchor="ctr"/>
+          <p:cNvPr id="41" name="Text 4"/>
+          <p:cNvSpPr txBox="1"/>
+          <p:nvPr/>
+        </p:nvSpPr>
+        <p:spPr>
+          <a:xfrm>
+            <a:off x="6062472" y="2971800"/>
+            <a:ext cx="1316736" cy="1371600"/>
+          </a:xfrm>
+          <a:prstGeom prst="rect">
+            <a:avLst/>
+          </a:prstGeom>
+          <a:noFill/>
+          <a:ln/>
+        </p:spPr>
+        <p:txBody>
+          <a:bodyPr wrap="square" lIns="0" tIns="0" rIns="0" bIns="0" rtlCol="0" anchor="t"/>
           <a:lstStyle/>
           <a:p>
             <a:pPr algn="ctr" indent="0" marL="0">
@@ -2056,7 +2056,7 @@
                 <a:ea typeface="Calibri" pitchFamily="34" charset="-122"/>
                 <a:cs typeface="Calibri" pitchFamily="34" charset="-120"/>
               </a:rPr>
-              <a:t>Mastery</a:t>
+              <a:t>First attempt and coach feedback</a:t>
             </a:r>
             <a:endParaRPr lang="en-US" sz="1600" dirty="0"/>
           </a:p>
@@ -2064,14 +2064,14 @@
       </p:sp>
       <p:sp>
         <p:nvSpPr>
-          <p:cNvPr id="20" name="Shape 17"/>
+          <p:cNvPr id="42" name="Shape 2"/>
           <p:cNvSpPr/>
           <p:nvPr/>
         </p:nvSpPr>
         <p:spPr>
           <a:xfrm>
-            <a:off x="8823960" y="2194560"/>
-            <a:ext cx="914400" cy="914400"/>
+            <a:off x="7680960" y="2011680"/>
+            <a:ext cx="822960" cy="822960"/>
           </a:xfrm>
           <a:prstGeom prst="ellipse">
             <a:avLst/>
@@ -2093,14 +2093,14 @@
       </p:sp>
       <p:sp>
         <p:nvSpPr>
-          <p:cNvPr id="21" name="Text 18"/>
-          <p:cNvSpPr txBox="1"/>
-          <p:nvPr/>
-        </p:nvSpPr>
-        <p:spPr>
-          <a:xfrm>
-            <a:off x="8823960" y="2194560"/>
-            <a:ext cx="914400" cy="914400"/>
+          <p:cNvPr id="43" name="Text 3"/>
+          <p:cNvSpPr txBox="1"/>
+          <p:nvPr/>
+        </p:nvSpPr>
+        <p:spPr>
+          <a:xfrm>
+            <a:off x="7680960" y="2011680"/>
+            <a:ext cx="822960" cy="822960"/>
           </a:xfrm>
           <a:prstGeom prst="rect">
             <a:avLst/>
@@ -2116,7 +2116,7 @@
               <a:buNone/>
             </a:pPr>
             <a:r>
-              <a:rPr lang="en-US" sz="3000" b="1" dirty="0">
+              <a:rPr lang="en-US" sz="2800" b="1" dirty="0">
                 <a:solidFill>
                   <a:srgbClr val="3B1217"/>
                 </a:solidFill>
@@ -2132,23 +2132,23 @@
       </p:sp>
       <p:sp>
         <p:nvSpPr>
-          <p:cNvPr id="22" name="Text 19"/>
-          <p:cNvSpPr txBox="1"/>
-          <p:nvPr/>
-        </p:nvSpPr>
-        <p:spPr>
-          <a:xfrm>
-            <a:off x="8549640" y="3291840"/>
-            <a:ext cx="1463040" cy="822960"/>
-          </a:xfrm>
-          <a:prstGeom prst="rect">
-            <a:avLst/>
-          </a:prstGeom>
-          <a:noFill/>
-          <a:ln/>
-        </p:spPr>
-        <p:txBody>
-          <a:bodyPr wrap="square" lIns="0" tIns="0" rIns="0" bIns="0" rtlCol="0" anchor="ctr"/>
+          <p:cNvPr id="44" name="Text 4"/>
+          <p:cNvSpPr txBox="1"/>
+          <p:nvPr/>
+        </p:nvSpPr>
+        <p:spPr>
+          <a:xfrm>
+            <a:off x="7434071" y="2971800"/>
+            <a:ext cx="1316736" cy="1371600"/>
+          </a:xfrm>
+          <a:prstGeom prst="rect">
+            <a:avLst/>
+          </a:prstGeom>
+          <a:noFill/>
+          <a:ln/>
+        </p:spPr>
+        <p:txBody>
+          <a:bodyPr wrap="square" lIns="0" tIns="0" rIns="0" bIns="0" rtlCol="0" anchor="t"/>
           <a:lstStyle/>
           <a:p>
             <a:pPr algn="ctr" indent="0" marL="0">
@@ -2163,7 +2163,7 @@
                 <a:ea typeface="Calibri" pitchFamily="34" charset="-122"/>
                 <a:cs typeface="Calibri" pitchFamily="34" charset="-120"/>
               </a:rPr>
-              <a:t>Quiz</a:t>
+              <a:t>Mastery attempt</a:t>
             </a:r>
             <a:endParaRPr lang="en-US" sz="1600" dirty="0"/>
           </a:p>
@@ -2171,14 +2171,14 @@
       </p:sp>
       <p:sp>
         <p:nvSpPr>
-          <p:cNvPr id="23" name="Shape 20"/>
+          <p:cNvPr id="45" name="Shape 2"/>
           <p:cNvSpPr/>
           <p:nvPr/>
         </p:nvSpPr>
         <p:spPr>
           <a:xfrm>
-            <a:off x="10424160" y="2194560"/>
-            <a:ext cx="914400" cy="914400"/>
+            <a:off x="9052560" y="2011680"/>
+            <a:ext cx="822960" cy="822960"/>
           </a:xfrm>
           <a:prstGeom prst="ellipse">
             <a:avLst/>
@@ -2200,14 +2200,14 @@
       </p:sp>
       <p:sp>
         <p:nvSpPr>
-          <p:cNvPr id="24" name="Text 21"/>
-          <p:cNvSpPr txBox="1"/>
-          <p:nvPr/>
-        </p:nvSpPr>
-        <p:spPr>
-          <a:xfrm>
-            <a:off x="10424160" y="2194560"/>
-            <a:ext cx="914400" cy="914400"/>
+          <p:cNvPr id="46" name="Text 3"/>
+          <p:cNvSpPr txBox="1"/>
+          <p:nvPr/>
+        </p:nvSpPr>
+        <p:spPr>
+          <a:xfrm>
+            <a:off x="9052560" y="2011680"/>
+            <a:ext cx="822960" cy="822960"/>
           </a:xfrm>
           <a:prstGeom prst="rect">
             <a:avLst/>
@@ -2223,7 +2223,7 @@
               <a:buNone/>
             </a:pPr>
             <a:r>
-              <a:rPr lang="en-US" sz="3000" b="1" dirty="0">
+              <a:rPr lang="en-US" sz="2800" b="1" dirty="0">
                 <a:solidFill>
                   <a:srgbClr val="3B1217"/>
                 </a:solidFill>
@@ -2239,14 +2239,82 @@
       </p:sp>
       <p:sp>
         <p:nvSpPr>
-          <p:cNvPr id="25" name="Text 22"/>
-          <p:cNvSpPr txBox="1"/>
-          <p:nvPr/>
-        </p:nvSpPr>
-        <p:spPr>
-          <a:xfrm>
-            <a:off x="10149840" y="3291840"/>
-            <a:ext cx="1463040" cy="822960"/>
+          <p:cNvPr id="47" name="Text 4"/>
+          <p:cNvSpPr txBox="1"/>
+          <p:nvPr/>
+        </p:nvSpPr>
+        <p:spPr>
+          <a:xfrm>
+            <a:off x="8805672" y="2971800"/>
+            <a:ext cx="1316736" cy="1371600"/>
+          </a:xfrm>
+          <a:prstGeom prst="rect">
+            <a:avLst/>
+          </a:prstGeom>
+          <a:noFill/>
+          <a:ln/>
+        </p:spPr>
+        <p:txBody>
+          <a:bodyPr wrap="square" lIns="0" tIns="0" rIns="0" bIns="0" rtlCol="0" anchor="t"/>
+          <a:lstStyle/>
+          <a:p>
+            <a:pPr algn="ctr" indent="0" marL="0">
+              <a:buNone/>
+            </a:pPr>
+            <a:r>
+              <a:rPr lang="en-US" sz="1600" b="1" dirty="0">
+                <a:solidFill>
+                  <a:srgbClr val="FFFFFF"/>
+                </a:solidFill>
+                <a:latin typeface="Calibri" pitchFamily="34" charset="0"/>
+                <a:ea typeface="Calibri" pitchFamily="34" charset="-122"/>
+                <a:cs typeface="Calibri" pitchFamily="34" charset="-120"/>
+              </a:rPr>
+              <a:t>Quiz</a:t>
+            </a:r>
+            <a:endParaRPr lang="en-US" sz="1600" dirty="0"/>
+          </a:p>
+        </p:txBody>
+      </p:sp>
+      <p:sp>
+        <p:nvSpPr>
+          <p:cNvPr id="48" name="Shape 2"/>
+          <p:cNvSpPr/>
+          <p:nvPr/>
+        </p:nvSpPr>
+        <p:spPr>
+          <a:xfrm>
+            <a:off x="10424160" y="2011680"/>
+            <a:ext cx="822960" cy="822960"/>
+          </a:xfrm>
+          <a:prstGeom prst="ellipse">
+            <a:avLst/>
+          </a:prstGeom>
+          <a:solidFill>
+            <a:srgbClr val="F1BE48"/>
+          </a:solidFill>
+          <a:ln w="12700">
+            <a:solidFill>
+              <a:srgbClr val="F1BE48"/>
+            </a:solidFill>
+            <a:prstDash val="solid"/>
+          </a:ln>
+        </p:spPr>
+        <p:txBody>
+          <a:bodyPr/>
+          <a:p/>
+        </p:txBody>
+      </p:sp>
+      <p:sp>
+        <p:nvSpPr>
+          <p:cNvPr id="49" name="Text 3"/>
+          <p:cNvSpPr txBox="1"/>
+          <p:nvPr/>
+        </p:nvSpPr>
+        <p:spPr>
+          <a:xfrm>
+            <a:off x="10424160" y="2011680"/>
+            <a:ext cx="822960" cy="822960"/>
           </a:xfrm>
           <a:prstGeom prst="rect">
             <a:avLst/>
@@ -2262,54 +2330,93 @@
               <a:buNone/>
             </a:pPr>
             <a:r>
-              <a:rPr lang="en-US" sz="1600" b="1" dirty="0">
-                <a:solidFill>
-                  <a:srgbClr val="FFFFFF"/>
-                </a:solidFill>
-                <a:latin typeface="Calibri" pitchFamily="34" charset="0"/>
-                <a:ea typeface="Calibri" pitchFamily="34" charset="-122"/>
-                <a:cs typeface="Calibri" pitchFamily="34" charset="-120"/>
-              </a:rPr>
-              <a:t>Reflect</a:t>
-            </a:r>
-            <a:endParaRPr lang="en-US" sz="1600" dirty="0"/>
-          </a:p>
-        </p:txBody>
-      </p:sp>
-      <p:sp>
-        <p:nvSpPr>
-          <p:cNvPr id="26" name="Text 23"/>
-          <p:cNvSpPr txBox="1"/>
-          <p:nvPr/>
-        </p:nvSpPr>
-        <p:spPr>
-          <a:xfrm>
-            <a:off x="548640" y="4846320"/>
-            <a:ext cx="10972800" cy="640080"/>
-          </a:xfrm>
-          <a:prstGeom prst="rect">
-            <a:avLst/>
-          </a:prstGeom>
-          <a:noFill/>
-          <a:ln/>
-        </p:spPr>
-        <p:txBody>
-          <a:bodyPr wrap="square" lIns="0" tIns="0" rIns="0" bIns="0" rtlCol="0" anchor="ctr"/>
-          <a:lstStyle/>
-          <a:p>
-            <a:pPr indent="0" marL="0">
-              <a:buNone/>
-            </a:pPr>
-            <a:r>
               <a:rPr lang="en-US" sz="2800" b="1" dirty="0">
                 <a:solidFill>
-                  <a:srgbClr val="FFFFFF"/>
+                  <a:srgbClr val="3B1217"/>
                 </a:solidFill>
                 <a:latin typeface="Cambria" pitchFamily="34" charset="0"/>
                 <a:ea typeface="Cambria" pitchFamily="34" charset="-122"/>
                 <a:cs typeface="Cambria" pitchFamily="34" charset="-120"/>
               </a:rPr>
-              <a:t>By Friday: a checked reconciliation and a reusable template.</a:t>
+              <a:t>8</a:t>
+            </a:r>
+            <a:endParaRPr lang="en-US" sz="3000" dirty="0"/>
+          </a:p>
+        </p:txBody>
+      </p:sp>
+      <p:sp>
+        <p:nvSpPr>
+          <p:cNvPr id="50" name="Text 4"/>
+          <p:cNvSpPr txBox="1"/>
+          <p:nvPr/>
+        </p:nvSpPr>
+        <p:spPr>
+          <a:xfrm>
+            <a:off x="10177272" y="2971800"/>
+            <a:ext cx="1316736" cy="1371600"/>
+          </a:xfrm>
+          <a:prstGeom prst="rect">
+            <a:avLst/>
+          </a:prstGeom>
+          <a:noFill/>
+          <a:ln/>
+        </p:spPr>
+        <p:txBody>
+          <a:bodyPr wrap="square" lIns="0" tIns="0" rIns="0" bIns="0" rtlCol="0" anchor="t"/>
+          <a:lstStyle/>
+          <a:p>
+            <a:pPr algn="ctr" indent="0" marL="0">
+              <a:buNone/>
+            </a:pPr>
+            <a:r>
+              <a:rPr lang="en-US" sz="1600" b="1" dirty="0">
+                <a:solidFill>
+                  <a:srgbClr val="FFFFFF"/>
+                </a:solidFill>
+                <a:latin typeface="Calibri" pitchFamily="34" charset="0"/>
+                <a:ea typeface="Calibri" pitchFamily="34" charset="-122"/>
+                <a:cs typeface="Calibri" pitchFamily="34" charset="-120"/>
+              </a:rPr>
+              <a:t>Reflection</a:t>
+            </a:r>
+            <a:endParaRPr lang="en-US" sz="1600" dirty="0"/>
+          </a:p>
+        </p:txBody>
+      </p:sp>
+      <p:sp>
+        <p:nvSpPr>
+          <p:cNvPr id="26" name="Text 23"/>
+          <p:cNvSpPr txBox="1"/>
+          <p:nvPr/>
+        </p:nvSpPr>
+        <p:spPr>
+          <a:xfrm>
+            <a:off x="548640" y="4846320"/>
+            <a:ext cx="10972800" cy="640080"/>
+          </a:xfrm>
+          <a:prstGeom prst="rect">
+            <a:avLst/>
+          </a:prstGeom>
+          <a:noFill/>
+          <a:ln/>
+        </p:spPr>
+        <p:txBody>
+          <a:bodyPr wrap="square" lIns="0" tIns="0" rIns="0" bIns="0" rtlCol="0" anchor="ctr"/>
+          <a:lstStyle/>
+          <a:p>
+            <a:pPr indent="0" marL="0">
+              <a:buNone/>
+            </a:pPr>
+            <a:r>
+              <a:rPr lang="en-US" sz="2800" b="1" dirty="0">
+                <a:solidFill>
+                  <a:srgbClr val="FFFFFF"/>
+                </a:solidFill>
+                <a:latin typeface="Cambria" pitchFamily="34" charset="0"/>
+                <a:ea typeface="Cambria" pitchFamily="34" charset="-122"/>
+                <a:cs typeface="Cambria" pitchFamily="34" charset="-120"/>
+              </a:rPr>
+              <a:t>Your goal: a checked reconciliation and a reusable template.</a:t>
             </a:r>
             <a:endParaRPr lang="en-US" sz="2800" dirty="0"/>
           </a:p>
